--- a/solution/report/1조_세미_팀프로젝트_결과보고서.pptx
+++ b/solution/report/1조_세미_팀프로젝트_결과보고서.pptx
@@ -4307,7 +4307,7 @@
                 <a:ea typeface="맑은 고딕"/>
                 <a:cs typeface="맑은 고딕"/>
               </a:rPr>
-              <a:t>2026.10.15 기준  |  발표 예정 2026.10.26</a:t>
+              <a:t>2026.10.25 기준  |  발표 예정 2026.10.26</a:t>
             </a:r>
           </a:p>
         </p:txBody>
@@ -8190,7 +8190,7 @@
                 <a:ea typeface="맑은 고딕"/>
                 <a:cs typeface="맑은 고딕"/>
               </a:rPr>
-              <a:t>컴파일 확인과 배포 환경 점검 항목 정리</a:t>
+              <a:t>로컬 Tomcat·DB·REST API·Webhook 통합 검증 완료, 배포 환경 점검은 후속</a:t>
             </a:r>
           </a:p>
         </p:txBody>
@@ -11499,7 +11499,7 @@
                 <a:ea typeface="맑은 고딕"/>
                 <a:cs typeface="맑은 고딕"/>
               </a:rPr>
-              <a:t>2026년 10월 15일 소스·문서 기준</a:t>
+              <a:t>2026년 10월 25일 소스·문서 기준</a:t>
             </a:r>
           </a:p>
         </p:txBody>
@@ -12652,7 +12652,7 @@
                 <a:ea typeface="맑은 고딕"/>
                 <a:cs typeface="맑은 고딕"/>
               </a:rPr>
-              <a:t>API Servlet 컴파일은 통과했습니다. Tomcat·DB 연결 후 실제 호출 및 Webhook 동작은 배포 환경에서 통합 확인이 필요합니다.</a:t>
+              <a:t>로컬 환경에서 Tomcat·DB 연결, REST API 실제 호출, Slack Webhook 동작을 확인했습니다. 실제 배포 환경 검증은 진행하지 않았습니다.</a:t>
             </a:r>
           </a:p>
         </p:txBody>
@@ -14135,7 +14135,7 @@
                 <a:ea typeface="맑은 고딕"/>
                 <a:cs typeface="맑은 고딕"/>
               </a:rPr>
-              <a:t>탐지 규칙의 오탐률과 입력 유형별 커버리지를 실제 데이터로 튜닝</a:t>
+              <a:t>운영 데이터를 활용해 탐지 규칙의 오탐률과 입력 유형별 커버리지를 점검할 필요가 있습니다.</a:t>
             </a:r>
           </a:p>
         </p:txBody>
@@ -14290,7 +14290,7 @@
                 <a:ea typeface="맑은 고딕"/>
                 <a:cs typeface="맑은 고딕"/>
               </a:rPr>
-              <a:t>운영 DB·Tomcat에서 REST API, Slack 실패·재시도까지 통합 검증</a:t>
+              <a:t>실제 배포 환경에서 API와 Webhook 연동을 추가 검증해야 합니다.</a:t>
             </a:r>
           </a:p>
         </p:txBody>
@@ -14591,7 +14591,7 @@
                 <a:ea typeface="맑은 고딕"/>
                 <a:cs typeface="맑은 고딕"/>
               </a:rPr>
-              <a:t>기능 구현과 구조 설계는 완료했으며, 실제 배포 환경 통합 검증을 거쳐야 운영 수준의 신뢰도를 판단할 수 있습니다.</a:t>
+              <a:t>주요 기능과 로컬 통합 검증을 완료했습니다. 실제 배포 환경 검증과 운영 데이터 기반 탐지 규칙 개선은 후속 과제로 남아 있습니다.</a:t>
             </a:r>
           </a:p>
         </p:txBody>
@@ -14828,7 +14828,7 @@
                 <a:ea typeface="맑은 고딕"/>
                 <a:cs typeface="맑은 고딕"/>
               </a:rPr>
-              <a:t>05 · EVALUATION</a:t>
+              <a:t>05 · Q&amp;A</a:t>
             </a:r>
           </a:p>
         </p:txBody>
@@ -14901,7 +14901,7 @@
                 <a:ea typeface="맑은 고딕"/>
                 <a:cs typeface="맑은 고딕"/>
               </a:rPr>
-              <a:t>마무리 일정과 시연 계획</a:t>
+              <a:t>질문과 답변</a:t>
             </a:r>
           </a:p>
         </p:txBody>
@@ -14974,7 +14974,7 @@
                 <a:ea typeface="맑은 고딕"/>
                 <a:cs typeface="맑은 고딕"/>
               </a:rPr>
-              <a:t>프로젝트 기간 2026.09.22–10.25  ·  발표 2026.10.26</a:t>
+              <a:t>질문과 의견을 받겠습니다</a:t>
             </a:r>
           </a:p>
         </p:txBody>
@@ -15245,768 +15245,6 @@
       </p:pic>
       <p:sp>
         <p:nvSpPr>
-          <p:cNvPr id="13" name="">
-            <a:extLst xmlns:a="http://schemas.openxmlformats.org/drawingml/2006/main">
-              <a:ext uri="{FF2B5EF4-FFF2-40B4-BE49-F238E27FC236}">
-                <a16:creationId xmlns:a16="http://schemas.microsoft.com/office/drawing/2014/main" id="{AA0C3FD5-5862-44AD-99E7-5534520A9523}"/>
-              </a:ext>
-            </a:extLst>
-          </p:cNvPr>
-          <p:cNvSpPr>
-            <a:spLocks xmlns:a="http://schemas.openxmlformats.org/drawingml/2006/main" noGrp="1"/>
-          </p:cNvSpPr>
-          <p:nvPr/>
-        </p:nvSpPr>
-        <p:spPr>
-          <a:xfrm xmlns:a="http://schemas.openxmlformats.org/drawingml/2006/main">
-            <a:off x="609600" y="2381250"/>
-            <a:ext cx="10972800" cy="657225"/>
-          </a:xfrm>
-          <a:prstGeom xmlns:a="http://schemas.openxmlformats.org/drawingml/2006/main" prst="roundRect">
-            <a:avLst>
-              <a:gd name="adj" fmla="val 11594"/>
-            </a:avLst>
-          </a:prstGeom>
-          <a:solidFill xmlns:a="http://schemas.openxmlformats.org/drawingml/2006/main">
-            <a:srgbClr val="FFFFFF"/>
-          </a:solidFill>
-          <a:ln xmlns:a="http://schemas.openxmlformats.org/drawingml/2006/main" w="9525">
-            <a:solidFill>
-              <a:srgbClr val="DCE4EE"/>
-            </a:solidFill>
-            <a:prstDash val="solid"/>
-          </a:ln>
-        </p:spPr>
-      </p:sp>
-      <p:sp>
-        <p:nvSpPr>
-          <p:cNvPr id="14" name="">
-            <a:extLst xmlns:a="http://schemas.openxmlformats.org/drawingml/2006/main">
-              <a:ext uri="{FF2B5EF4-FFF2-40B4-BE49-F238E27FC236}">
-                <a16:creationId xmlns:a16="http://schemas.microsoft.com/office/drawing/2014/main" id="{59CA28B2-0290-410B-A16D-72B8EA2733C6}"/>
-              </a:ext>
-            </a:extLst>
-          </p:cNvPr>
-          <p:cNvSpPr>
-            <a:spLocks xmlns:a="http://schemas.openxmlformats.org/drawingml/2006/main" noGrp="1"/>
-          </p:cNvSpPr>
-          <p:nvPr/>
-        </p:nvSpPr>
-        <p:spPr>
-          <a:xfrm xmlns:a="http://schemas.openxmlformats.org/drawingml/2006/main">
-            <a:off x="838200" y="2514600"/>
-            <a:ext cx="1714500" cy="361950"/>
-          </a:xfrm>
-          <a:prstGeom xmlns:a="http://schemas.openxmlformats.org/drawingml/2006/main" prst="rect">
-            <a:avLst/>
-          </a:prstGeom>
-          <a:noFill xmlns:a="http://schemas.openxmlformats.org/drawingml/2006/main"/>
-          <a:ln xmlns:a="http://schemas.openxmlformats.org/drawingml/2006/main" w="0">
-            <a:noFill/>
-            <a:prstDash val="solid"/>
-          </a:ln>
-        </p:spPr>
-        <p:txBody>
-          <a:bodyPr xmlns:a="http://schemas.openxmlformats.org/drawingml/2006/main" wrap="square" lIns="0" tIns="0" rIns="0" bIns="0" anchor="ctr">
-            <a:normAutofit fontScale="100000"/>
-          </a:bodyPr>
-          <a:lstStyle xmlns:a="http://schemas.openxmlformats.org/drawingml/2006/main">
-            <a:defPPr algn="l">
-              <a:defRPr sz="1350" b="1">
-                <a:solidFill>
-                  <a:srgbClr val="2F6EB5"/>
-                </a:solidFill>
-                <a:latin typeface="맑은 고딕"/>
-                <a:ea typeface="맑은 고딕"/>
-                <a:cs typeface="맑은 고딕"/>
-              </a:defRPr>
-            </a:defPPr>
-          </a:lstStyle>
-          <a:p xmlns:a="http://schemas.openxmlformats.org/drawingml/2006/main">
-            <a:pPr algn="l">
-              <a:lnSpc>
-                <a:spcPct val="115000"/>
-              </a:lnSpc>
-              <a:buNone/>
-              <a:defRPr sz="1350" b="1">
-                <a:solidFill>
-                  <a:srgbClr val="2F6EB5"/>
-                </a:solidFill>
-                <a:latin typeface="맑은 고딕"/>
-                <a:ea typeface="맑은 고딕"/>
-                <a:cs typeface="맑은 고딕"/>
-              </a:defRPr>
-            </a:pPr>
-            <a:r>
-              <a:rPr sz="1350" b="1">
-                <a:solidFill>
-                  <a:srgbClr val="2F6EB5"/>
-                </a:solidFill>
-                <a:latin typeface="맑은 고딕"/>
-                <a:ea typeface="맑은 고딕"/>
-                <a:cs typeface="맑은 고딕"/>
-              </a:rPr>
-              <a:t>10/08–10/18</a:t>
-            </a:r>
-          </a:p>
-        </p:txBody>
-      </p:sp>
-      <p:sp>
-        <p:nvSpPr>
-          <p:cNvPr id="15" name="">
-            <a:extLst xmlns:a="http://schemas.openxmlformats.org/drawingml/2006/main">
-              <a:ext uri="{FF2B5EF4-FFF2-40B4-BE49-F238E27FC236}">
-                <a16:creationId xmlns:a16="http://schemas.microsoft.com/office/drawing/2014/main" id="{7C1FCD66-F089-481C-8D9D-2D7710152DAD}"/>
-              </a:ext>
-            </a:extLst>
-          </p:cNvPr>
-          <p:cNvSpPr>
-            <a:spLocks xmlns:a="http://schemas.openxmlformats.org/drawingml/2006/main" noGrp="1"/>
-          </p:cNvSpPr>
-          <p:nvPr/>
-        </p:nvSpPr>
-        <p:spPr>
-          <a:xfrm xmlns:a="http://schemas.openxmlformats.org/drawingml/2006/main">
-            <a:off x="2762250" y="2514600"/>
-            <a:ext cx="1476375" cy="361950"/>
-          </a:xfrm>
-          <a:prstGeom xmlns:a="http://schemas.openxmlformats.org/drawingml/2006/main" prst="rect">
-            <a:avLst/>
-          </a:prstGeom>
-          <a:noFill xmlns:a="http://schemas.openxmlformats.org/drawingml/2006/main"/>
-          <a:ln xmlns:a="http://schemas.openxmlformats.org/drawingml/2006/main" w="0">
-            <a:noFill/>
-            <a:prstDash val="solid"/>
-          </a:ln>
-        </p:spPr>
-        <p:txBody>
-          <a:bodyPr xmlns:a="http://schemas.openxmlformats.org/drawingml/2006/main" wrap="square" lIns="0" tIns="0" rIns="0" bIns="0" anchor="ctr">
-            <a:normAutofit fontScale="100000"/>
-          </a:bodyPr>
-          <a:lstStyle xmlns:a="http://schemas.openxmlformats.org/drawingml/2006/main">
-            <a:defPPr algn="l">
-              <a:defRPr sz="1350" b="1">
-                <a:solidFill>
-                  <a:srgbClr val="102A56"/>
-                </a:solidFill>
-                <a:latin typeface="맑은 고딕"/>
-                <a:ea typeface="맑은 고딕"/>
-                <a:cs typeface="맑은 고딕"/>
-              </a:defRPr>
-            </a:defPPr>
-          </a:lstStyle>
-          <a:p xmlns:a="http://schemas.openxmlformats.org/drawingml/2006/main">
-            <a:pPr algn="l">
-              <a:lnSpc>
-                <a:spcPct val="115000"/>
-              </a:lnSpc>
-              <a:buNone/>
-              <a:defRPr sz="1350" b="1">
-                <a:solidFill>
-                  <a:srgbClr val="102A56"/>
-                </a:solidFill>
-                <a:latin typeface="맑은 고딕"/>
-                <a:ea typeface="맑은 고딕"/>
-                <a:cs typeface="맑은 고딕"/>
-              </a:defRPr>
-            </a:pPr>
-            <a:r>
-              <a:rPr sz="1350" b="1">
-                <a:solidFill>
-                  <a:srgbClr val="102A56"/>
-                </a:solidFill>
-                <a:latin typeface="맑은 고딕"/>
-                <a:ea typeface="맑은 고딕"/>
-                <a:cs typeface="맑은 고딕"/>
-              </a:rPr>
-              <a:t>통합 검증</a:t>
-            </a:r>
-          </a:p>
-        </p:txBody>
-      </p:sp>
-      <p:sp>
-        <p:nvSpPr>
-          <p:cNvPr id="16" name="">
-            <a:extLst xmlns:a="http://schemas.openxmlformats.org/drawingml/2006/main">
-              <a:ext uri="{FF2B5EF4-FFF2-40B4-BE49-F238E27FC236}">
-                <a16:creationId xmlns:a16="http://schemas.microsoft.com/office/drawing/2014/main" id="{0290F3B6-3CB6-4D3F-A10D-74D7113962A5}"/>
-              </a:ext>
-            </a:extLst>
-          </p:cNvPr>
-          <p:cNvSpPr>
-            <a:spLocks xmlns:a="http://schemas.openxmlformats.org/drawingml/2006/main" noGrp="1"/>
-          </p:cNvSpPr>
-          <p:nvPr/>
-        </p:nvSpPr>
-        <p:spPr>
-          <a:xfrm xmlns:a="http://schemas.openxmlformats.org/drawingml/2006/main">
-            <a:off x="4429125" y="2514600"/>
-            <a:ext cx="6858000" cy="361950"/>
-          </a:xfrm>
-          <a:prstGeom xmlns:a="http://schemas.openxmlformats.org/drawingml/2006/main" prst="rect">
-            <a:avLst/>
-          </a:prstGeom>
-          <a:noFill xmlns:a="http://schemas.openxmlformats.org/drawingml/2006/main"/>
-          <a:ln xmlns:a="http://schemas.openxmlformats.org/drawingml/2006/main" w="0">
-            <a:noFill/>
-            <a:prstDash val="solid"/>
-          </a:ln>
-        </p:spPr>
-        <p:txBody>
-          <a:bodyPr xmlns:a="http://schemas.openxmlformats.org/drawingml/2006/main" wrap="square" lIns="0" tIns="0" rIns="0" bIns="0" anchor="ctr">
-            <a:normAutofit fontScale="100000"/>
-          </a:bodyPr>
-          <a:lstStyle xmlns:a="http://schemas.openxmlformats.org/drawingml/2006/main">
-            <a:defPPr algn="l">
-              <a:defRPr sz="1200" b="0">
-                <a:solidFill>
-                  <a:srgbClr val="63738A"/>
-                </a:solidFill>
-                <a:latin typeface="맑은 고딕"/>
-                <a:ea typeface="맑은 고딕"/>
-                <a:cs typeface="맑은 고딕"/>
-              </a:defRPr>
-            </a:defPPr>
-          </a:lstStyle>
-          <a:p xmlns:a="http://schemas.openxmlformats.org/drawingml/2006/main">
-            <a:pPr algn="l">
-              <a:lnSpc>
-                <a:spcPct val="115000"/>
-              </a:lnSpc>
-              <a:buNone/>
-              <a:defRPr sz="1200" b="0">
-                <a:solidFill>
-                  <a:srgbClr val="63738A"/>
-                </a:solidFill>
-                <a:latin typeface="맑은 고딕"/>
-                <a:ea typeface="맑은 고딕"/>
-                <a:cs typeface="맑은 고딕"/>
-              </a:defRPr>
-            </a:pPr>
-            <a:r>
-              <a:rPr sz="1200" b="0">
-                <a:solidFill>
-                  <a:srgbClr val="63738A"/>
-                </a:solidFill>
-                <a:latin typeface="맑은 고딕"/>
-                <a:ea typeface="맑은 고딕"/>
-                <a:cs typeface="맑은 고딕"/>
-              </a:rPr>
-              <a:t>권한 · 세션 · CSRF · DB · AI/Slack 실패 · 오탐 확인</a:t>
-            </a:r>
-          </a:p>
-        </p:txBody>
-      </p:sp>
-      <p:sp>
-        <p:nvSpPr>
-          <p:cNvPr id="17" name="">
-            <a:extLst xmlns:a="http://schemas.openxmlformats.org/drawingml/2006/main">
-              <a:ext uri="{FF2B5EF4-FFF2-40B4-BE49-F238E27FC236}">
-                <a16:creationId xmlns:a16="http://schemas.microsoft.com/office/drawing/2014/main" id="{B42C84E5-03AB-410A-A7C6-6788E89FB193}"/>
-              </a:ext>
-            </a:extLst>
-          </p:cNvPr>
-          <p:cNvSpPr>
-            <a:spLocks xmlns:a="http://schemas.openxmlformats.org/drawingml/2006/main" noGrp="1"/>
-          </p:cNvSpPr>
-          <p:nvPr/>
-        </p:nvSpPr>
-        <p:spPr>
-          <a:xfrm xmlns:a="http://schemas.openxmlformats.org/drawingml/2006/main">
-            <a:off x="609600" y="3248025"/>
-            <a:ext cx="10972800" cy="657225"/>
-          </a:xfrm>
-          <a:prstGeom xmlns:a="http://schemas.openxmlformats.org/drawingml/2006/main" prst="roundRect">
-            <a:avLst>
-              <a:gd name="adj" fmla="val 11594"/>
-            </a:avLst>
-          </a:prstGeom>
-          <a:solidFill xmlns:a="http://schemas.openxmlformats.org/drawingml/2006/main">
-            <a:srgbClr val="FFFFFF"/>
-          </a:solidFill>
-          <a:ln xmlns:a="http://schemas.openxmlformats.org/drawingml/2006/main" w="9525">
-            <a:solidFill>
-              <a:srgbClr val="DCE4EE"/>
-            </a:solidFill>
-            <a:prstDash val="solid"/>
-          </a:ln>
-        </p:spPr>
-      </p:sp>
-      <p:sp>
-        <p:nvSpPr>
-          <p:cNvPr id="18" name="">
-            <a:extLst xmlns:a="http://schemas.openxmlformats.org/drawingml/2006/main">
-              <a:ext uri="{FF2B5EF4-FFF2-40B4-BE49-F238E27FC236}">
-                <a16:creationId xmlns:a16="http://schemas.microsoft.com/office/drawing/2014/main" id="{D51A15B8-3C58-470E-A876-5C3F811348E5}"/>
-              </a:ext>
-            </a:extLst>
-          </p:cNvPr>
-          <p:cNvSpPr>
-            <a:spLocks xmlns:a="http://schemas.openxmlformats.org/drawingml/2006/main" noGrp="1"/>
-          </p:cNvSpPr>
-          <p:nvPr/>
-        </p:nvSpPr>
-        <p:spPr>
-          <a:xfrm xmlns:a="http://schemas.openxmlformats.org/drawingml/2006/main">
-            <a:off x="838200" y="3381375"/>
-            <a:ext cx="1714500" cy="361950"/>
-          </a:xfrm>
-          <a:prstGeom xmlns:a="http://schemas.openxmlformats.org/drawingml/2006/main" prst="rect">
-            <a:avLst/>
-          </a:prstGeom>
-          <a:noFill xmlns:a="http://schemas.openxmlformats.org/drawingml/2006/main"/>
-          <a:ln xmlns:a="http://schemas.openxmlformats.org/drawingml/2006/main" w="0">
-            <a:noFill/>
-            <a:prstDash val="solid"/>
-          </a:ln>
-        </p:spPr>
-        <p:txBody>
-          <a:bodyPr xmlns:a="http://schemas.openxmlformats.org/drawingml/2006/main" wrap="square" lIns="0" tIns="0" rIns="0" bIns="0" anchor="ctr">
-            <a:normAutofit fontScale="100000"/>
-          </a:bodyPr>
-          <a:lstStyle xmlns:a="http://schemas.openxmlformats.org/drawingml/2006/main">
-            <a:defPPr algn="l">
-              <a:defRPr sz="1350" b="1">
-                <a:solidFill>
-                  <a:srgbClr val="2F6EB5"/>
-                </a:solidFill>
-                <a:latin typeface="맑은 고딕"/>
-                <a:ea typeface="맑은 고딕"/>
-                <a:cs typeface="맑은 고딕"/>
-              </a:defRPr>
-            </a:defPPr>
-          </a:lstStyle>
-          <a:p xmlns:a="http://schemas.openxmlformats.org/drawingml/2006/main">
-            <a:pPr algn="l">
-              <a:lnSpc>
-                <a:spcPct val="115000"/>
-              </a:lnSpc>
-              <a:buNone/>
-              <a:defRPr sz="1350" b="1">
-                <a:solidFill>
-                  <a:srgbClr val="2F6EB5"/>
-                </a:solidFill>
-                <a:latin typeface="맑은 고딕"/>
-                <a:ea typeface="맑은 고딕"/>
-                <a:cs typeface="맑은 고딕"/>
-              </a:defRPr>
-            </a:pPr>
-            <a:r>
-              <a:rPr sz="1350" b="1">
-                <a:solidFill>
-                  <a:srgbClr val="2F6EB5"/>
-                </a:solidFill>
-                <a:latin typeface="맑은 고딕"/>
-                <a:ea typeface="맑은 고딕"/>
-                <a:cs typeface="맑은 고딕"/>
-              </a:rPr>
-              <a:t>10/19–10/25</a:t>
-            </a:r>
-          </a:p>
-        </p:txBody>
-      </p:sp>
-      <p:sp>
-        <p:nvSpPr>
-          <p:cNvPr id="19" name="">
-            <a:extLst xmlns:a="http://schemas.openxmlformats.org/drawingml/2006/main">
-              <a:ext uri="{FF2B5EF4-FFF2-40B4-BE49-F238E27FC236}">
-                <a16:creationId xmlns:a16="http://schemas.microsoft.com/office/drawing/2014/main" id="{760BBE60-5D3E-4994-823C-A943ACA4BD36}"/>
-              </a:ext>
-            </a:extLst>
-          </p:cNvPr>
-          <p:cNvSpPr>
-            <a:spLocks xmlns:a="http://schemas.openxmlformats.org/drawingml/2006/main" noGrp="1"/>
-          </p:cNvSpPr>
-          <p:nvPr/>
-        </p:nvSpPr>
-        <p:spPr>
-          <a:xfrm xmlns:a="http://schemas.openxmlformats.org/drawingml/2006/main">
-            <a:off x="2762250" y="3381375"/>
-            <a:ext cx="1476375" cy="361950"/>
-          </a:xfrm>
-          <a:prstGeom xmlns:a="http://schemas.openxmlformats.org/drawingml/2006/main" prst="rect">
-            <a:avLst/>
-          </a:prstGeom>
-          <a:noFill xmlns:a="http://schemas.openxmlformats.org/drawingml/2006/main"/>
-          <a:ln xmlns:a="http://schemas.openxmlformats.org/drawingml/2006/main" w="0">
-            <a:noFill/>
-            <a:prstDash val="solid"/>
-          </a:ln>
-        </p:spPr>
-        <p:txBody>
-          <a:bodyPr xmlns:a="http://schemas.openxmlformats.org/drawingml/2006/main" wrap="square" lIns="0" tIns="0" rIns="0" bIns="0" anchor="ctr">
-            <a:normAutofit fontScale="100000"/>
-          </a:bodyPr>
-          <a:lstStyle xmlns:a="http://schemas.openxmlformats.org/drawingml/2006/main">
-            <a:defPPr algn="l">
-              <a:defRPr sz="1350" b="1">
-                <a:solidFill>
-                  <a:srgbClr val="102A56"/>
-                </a:solidFill>
-                <a:latin typeface="맑은 고딕"/>
-                <a:ea typeface="맑은 고딕"/>
-                <a:cs typeface="맑은 고딕"/>
-              </a:defRPr>
-            </a:defPPr>
-          </a:lstStyle>
-          <a:p xmlns:a="http://schemas.openxmlformats.org/drawingml/2006/main">
-            <a:pPr algn="l">
-              <a:lnSpc>
-                <a:spcPct val="115000"/>
-              </a:lnSpc>
-              <a:buNone/>
-              <a:defRPr sz="1350" b="1">
-                <a:solidFill>
-                  <a:srgbClr val="102A56"/>
-                </a:solidFill>
-                <a:latin typeface="맑은 고딕"/>
-                <a:ea typeface="맑은 고딕"/>
-                <a:cs typeface="맑은 고딕"/>
-              </a:defRPr>
-            </a:pPr>
-            <a:r>
-              <a:rPr sz="1350" b="1">
-                <a:solidFill>
-                  <a:srgbClr val="102A56"/>
-                </a:solidFill>
-                <a:latin typeface="맑은 고딕"/>
-                <a:ea typeface="맑은 고딕"/>
-                <a:cs typeface="맑은 고딕"/>
-              </a:rPr>
-              <a:t>마무리</a:t>
-            </a:r>
-          </a:p>
-        </p:txBody>
-      </p:sp>
-      <p:sp>
-        <p:nvSpPr>
-          <p:cNvPr id="20" name="">
-            <a:extLst xmlns:a="http://schemas.openxmlformats.org/drawingml/2006/main">
-              <a:ext uri="{FF2B5EF4-FFF2-40B4-BE49-F238E27FC236}">
-                <a16:creationId xmlns:a16="http://schemas.microsoft.com/office/drawing/2014/main" id="{3E01E2F0-EA6D-41D2-8E56-CB955359D58C}"/>
-              </a:ext>
-            </a:extLst>
-          </p:cNvPr>
-          <p:cNvSpPr>
-            <a:spLocks xmlns:a="http://schemas.openxmlformats.org/drawingml/2006/main" noGrp="1"/>
-          </p:cNvSpPr>
-          <p:nvPr/>
-        </p:nvSpPr>
-        <p:spPr>
-          <a:xfrm xmlns:a="http://schemas.openxmlformats.org/drawingml/2006/main">
-            <a:off x="4429125" y="3381375"/>
-            <a:ext cx="6858000" cy="361950"/>
-          </a:xfrm>
-          <a:prstGeom xmlns:a="http://schemas.openxmlformats.org/drawingml/2006/main" prst="rect">
-            <a:avLst/>
-          </a:prstGeom>
-          <a:noFill xmlns:a="http://schemas.openxmlformats.org/drawingml/2006/main"/>
-          <a:ln xmlns:a="http://schemas.openxmlformats.org/drawingml/2006/main" w="0">
-            <a:noFill/>
-            <a:prstDash val="solid"/>
-          </a:ln>
-        </p:spPr>
-        <p:txBody>
-          <a:bodyPr xmlns:a="http://schemas.openxmlformats.org/drawingml/2006/main" wrap="square" lIns="0" tIns="0" rIns="0" bIns="0" anchor="ctr">
-            <a:normAutofit fontScale="100000"/>
-          </a:bodyPr>
-          <a:lstStyle xmlns:a="http://schemas.openxmlformats.org/drawingml/2006/main">
-            <a:defPPr algn="l">
-              <a:defRPr sz="1200" b="0">
-                <a:solidFill>
-                  <a:srgbClr val="63738A"/>
-                </a:solidFill>
-                <a:latin typeface="맑은 고딕"/>
-                <a:ea typeface="맑은 고딕"/>
-                <a:cs typeface="맑은 고딕"/>
-              </a:defRPr>
-            </a:defPPr>
-          </a:lstStyle>
-          <a:p xmlns:a="http://schemas.openxmlformats.org/drawingml/2006/main">
-            <a:pPr algn="l">
-              <a:lnSpc>
-                <a:spcPct val="115000"/>
-              </a:lnSpc>
-              <a:buNone/>
-              <a:defRPr sz="1200" b="0">
-                <a:solidFill>
-                  <a:srgbClr val="63738A"/>
-                </a:solidFill>
-                <a:latin typeface="맑은 고딕"/>
-                <a:ea typeface="맑은 고딕"/>
-                <a:cs typeface="맑은 고딕"/>
-              </a:defRPr>
-            </a:pPr>
-            <a:r>
-              <a:rPr sz="1200" b="0">
-                <a:solidFill>
-                  <a:srgbClr val="63738A"/>
-                </a:solidFill>
-                <a:latin typeface="맑은 고딕"/>
-                <a:ea typeface="맑은 고딕"/>
-                <a:cs typeface="맑은 고딕"/>
-              </a:rPr>
-              <a:t>결함 수정 · 새 PC 재현 · 결과 자료 · 시연 리허설</a:t>
-            </a:r>
-          </a:p>
-        </p:txBody>
-      </p:sp>
-      <p:sp>
-        <p:nvSpPr>
-          <p:cNvPr id="21" name="">
-            <a:extLst xmlns:a="http://schemas.openxmlformats.org/drawingml/2006/main">
-              <a:ext uri="{FF2B5EF4-FFF2-40B4-BE49-F238E27FC236}">
-                <a16:creationId xmlns:a16="http://schemas.microsoft.com/office/drawing/2014/main" id="{39281DB4-6151-43F9-BBB4-888BC1C68CA1}"/>
-              </a:ext>
-            </a:extLst>
-          </p:cNvPr>
-          <p:cNvSpPr>
-            <a:spLocks xmlns:a="http://schemas.openxmlformats.org/drawingml/2006/main" noGrp="1"/>
-          </p:cNvSpPr>
-          <p:nvPr/>
-        </p:nvSpPr>
-        <p:spPr>
-          <a:xfrm xmlns:a="http://schemas.openxmlformats.org/drawingml/2006/main">
-            <a:off x="609600" y="4114800"/>
-            <a:ext cx="10972800" cy="657225"/>
-          </a:xfrm>
-          <a:prstGeom xmlns:a="http://schemas.openxmlformats.org/drawingml/2006/main" prst="roundRect">
-            <a:avLst>
-              <a:gd name="adj" fmla="val 11594"/>
-            </a:avLst>
-          </a:prstGeom>
-          <a:solidFill xmlns:a="http://schemas.openxmlformats.org/drawingml/2006/main">
-            <a:srgbClr val="EAF2FA"/>
-          </a:solidFill>
-          <a:ln xmlns:a="http://schemas.openxmlformats.org/drawingml/2006/main" w="9525">
-            <a:solidFill>
-              <a:srgbClr val="DCE4EE"/>
-            </a:solidFill>
-            <a:prstDash val="solid"/>
-          </a:ln>
-        </p:spPr>
-      </p:sp>
-      <p:sp>
-        <p:nvSpPr>
-          <p:cNvPr id="22" name="">
-            <a:extLst xmlns:a="http://schemas.openxmlformats.org/drawingml/2006/main">
-              <a:ext uri="{FF2B5EF4-FFF2-40B4-BE49-F238E27FC236}">
-                <a16:creationId xmlns:a16="http://schemas.microsoft.com/office/drawing/2014/main" id="{08BE699A-A0CA-450C-AF4C-3741EA21A25F}"/>
-              </a:ext>
-            </a:extLst>
-          </p:cNvPr>
-          <p:cNvSpPr>
-            <a:spLocks xmlns:a="http://schemas.openxmlformats.org/drawingml/2006/main" noGrp="1"/>
-          </p:cNvSpPr>
-          <p:nvPr/>
-        </p:nvSpPr>
-        <p:spPr>
-          <a:xfrm xmlns:a="http://schemas.openxmlformats.org/drawingml/2006/main">
-            <a:off x="838200" y="4248150"/>
-            <a:ext cx="1714500" cy="361950"/>
-          </a:xfrm>
-          <a:prstGeom xmlns:a="http://schemas.openxmlformats.org/drawingml/2006/main" prst="rect">
-            <a:avLst/>
-          </a:prstGeom>
-          <a:noFill xmlns:a="http://schemas.openxmlformats.org/drawingml/2006/main"/>
-          <a:ln xmlns:a="http://schemas.openxmlformats.org/drawingml/2006/main" w="0">
-            <a:noFill/>
-            <a:prstDash val="solid"/>
-          </a:ln>
-        </p:spPr>
-        <p:txBody>
-          <a:bodyPr xmlns:a="http://schemas.openxmlformats.org/drawingml/2006/main" wrap="square" lIns="0" tIns="0" rIns="0" bIns="0" anchor="ctr">
-            <a:normAutofit fontScale="100000"/>
-          </a:bodyPr>
-          <a:lstStyle xmlns:a="http://schemas.openxmlformats.org/drawingml/2006/main">
-            <a:defPPr algn="l">
-              <a:defRPr sz="1350" b="1">
-                <a:solidFill>
-                  <a:srgbClr val="2F6EB5"/>
-                </a:solidFill>
-                <a:latin typeface="맑은 고딕"/>
-                <a:ea typeface="맑은 고딕"/>
-                <a:cs typeface="맑은 고딕"/>
-              </a:defRPr>
-            </a:defPPr>
-          </a:lstStyle>
-          <a:p xmlns:a="http://schemas.openxmlformats.org/drawingml/2006/main">
-            <a:pPr algn="l">
-              <a:lnSpc>
-                <a:spcPct val="115000"/>
-              </a:lnSpc>
-              <a:buNone/>
-              <a:defRPr sz="1350" b="1">
-                <a:solidFill>
-                  <a:srgbClr val="2F6EB5"/>
-                </a:solidFill>
-                <a:latin typeface="맑은 고딕"/>
-                <a:ea typeface="맑은 고딕"/>
-                <a:cs typeface="맑은 고딕"/>
-              </a:defRPr>
-            </a:pPr>
-            <a:r>
-              <a:rPr sz="1350" b="1">
-                <a:solidFill>
-                  <a:srgbClr val="2F6EB5"/>
-                </a:solidFill>
-                <a:latin typeface="맑은 고딕"/>
-                <a:ea typeface="맑은 고딕"/>
-                <a:cs typeface="맑은 고딕"/>
-              </a:rPr>
-              <a:t>10/26</a:t>
-            </a:r>
-          </a:p>
-        </p:txBody>
-      </p:sp>
-      <p:sp>
-        <p:nvSpPr>
-          <p:cNvPr id="23" name="">
-            <a:extLst xmlns:a="http://schemas.openxmlformats.org/drawingml/2006/main">
-              <a:ext uri="{FF2B5EF4-FFF2-40B4-BE49-F238E27FC236}">
-                <a16:creationId xmlns:a16="http://schemas.microsoft.com/office/drawing/2014/main" id="{0355D132-7DB6-4610-A5C6-3C33F9ED2512}"/>
-              </a:ext>
-            </a:extLst>
-          </p:cNvPr>
-          <p:cNvSpPr>
-            <a:spLocks xmlns:a="http://schemas.openxmlformats.org/drawingml/2006/main" noGrp="1"/>
-          </p:cNvSpPr>
-          <p:nvPr/>
-        </p:nvSpPr>
-        <p:spPr>
-          <a:xfrm xmlns:a="http://schemas.openxmlformats.org/drawingml/2006/main">
-            <a:off x="2762250" y="4248150"/>
-            <a:ext cx="1476375" cy="361950"/>
-          </a:xfrm>
-          <a:prstGeom xmlns:a="http://schemas.openxmlformats.org/drawingml/2006/main" prst="rect">
-            <a:avLst/>
-          </a:prstGeom>
-          <a:noFill xmlns:a="http://schemas.openxmlformats.org/drawingml/2006/main"/>
-          <a:ln xmlns:a="http://schemas.openxmlformats.org/drawingml/2006/main" w="0">
-            <a:noFill/>
-            <a:prstDash val="solid"/>
-          </a:ln>
-        </p:spPr>
-        <p:txBody>
-          <a:bodyPr xmlns:a="http://schemas.openxmlformats.org/drawingml/2006/main" wrap="square" lIns="0" tIns="0" rIns="0" bIns="0" anchor="ctr">
-            <a:normAutofit fontScale="100000"/>
-          </a:bodyPr>
-          <a:lstStyle xmlns:a="http://schemas.openxmlformats.org/drawingml/2006/main">
-            <a:defPPr algn="l">
-              <a:defRPr sz="1350" b="1">
-                <a:solidFill>
-                  <a:srgbClr val="102A56"/>
-                </a:solidFill>
-                <a:latin typeface="맑은 고딕"/>
-                <a:ea typeface="맑은 고딕"/>
-                <a:cs typeface="맑은 고딕"/>
-              </a:defRPr>
-            </a:defPPr>
-          </a:lstStyle>
-          <a:p xmlns:a="http://schemas.openxmlformats.org/drawingml/2006/main">
-            <a:pPr algn="l">
-              <a:lnSpc>
-                <a:spcPct val="115000"/>
-              </a:lnSpc>
-              <a:buNone/>
-              <a:defRPr sz="1350" b="1">
-                <a:solidFill>
-                  <a:srgbClr val="102A56"/>
-                </a:solidFill>
-                <a:latin typeface="맑은 고딕"/>
-                <a:ea typeface="맑은 고딕"/>
-                <a:cs typeface="맑은 고딕"/>
-              </a:defRPr>
-            </a:pPr>
-            <a:r>
-              <a:rPr sz="1350" b="1">
-                <a:solidFill>
-                  <a:srgbClr val="102A56"/>
-                </a:solidFill>
-                <a:latin typeface="맑은 고딕"/>
-                <a:ea typeface="맑은 고딕"/>
-                <a:cs typeface="맑은 고딕"/>
-              </a:rPr>
-              <a:t>발표</a:t>
-            </a:r>
-          </a:p>
-        </p:txBody>
-      </p:sp>
-      <p:sp>
-        <p:nvSpPr>
-          <p:cNvPr id="24" name="">
-            <a:extLst xmlns:a="http://schemas.openxmlformats.org/drawingml/2006/main">
-              <a:ext uri="{FF2B5EF4-FFF2-40B4-BE49-F238E27FC236}">
-                <a16:creationId xmlns:a16="http://schemas.microsoft.com/office/drawing/2014/main" id="{858C5AD8-5BD7-43B8-B277-82C8A9F75CCE}"/>
-              </a:ext>
-            </a:extLst>
-          </p:cNvPr>
-          <p:cNvSpPr>
-            <a:spLocks xmlns:a="http://schemas.openxmlformats.org/drawingml/2006/main" noGrp="1"/>
-          </p:cNvSpPr>
-          <p:nvPr/>
-        </p:nvSpPr>
-        <p:spPr>
-          <a:xfrm xmlns:a="http://schemas.openxmlformats.org/drawingml/2006/main">
-            <a:off x="4429125" y="4248150"/>
-            <a:ext cx="6858000" cy="361950"/>
-          </a:xfrm>
-          <a:prstGeom xmlns:a="http://schemas.openxmlformats.org/drawingml/2006/main" prst="rect">
-            <a:avLst/>
-          </a:prstGeom>
-          <a:noFill xmlns:a="http://schemas.openxmlformats.org/drawingml/2006/main"/>
-          <a:ln xmlns:a="http://schemas.openxmlformats.org/drawingml/2006/main" w="0">
-            <a:noFill/>
-            <a:prstDash val="solid"/>
-          </a:ln>
-        </p:spPr>
-        <p:txBody>
-          <a:bodyPr xmlns:a="http://schemas.openxmlformats.org/drawingml/2006/main" wrap="square" lIns="0" tIns="0" rIns="0" bIns="0" anchor="ctr">
-            <a:normAutofit fontScale="100000"/>
-          </a:bodyPr>
-          <a:lstStyle xmlns:a="http://schemas.openxmlformats.org/drawingml/2006/main">
-            <a:defPPr algn="l">
-              <a:defRPr sz="1200" b="0">
-                <a:solidFill>
-                  <a:srgbClr val="63738A"/>
-                </a:solidFill>
-                <a:latin typeface="맑은 고딕"/>
-                <a:ea typeface="맑은 고딕"/>
-                <a:cs typeface="맑은 고딕"/>
-              </a:defRPr>
-            </a:defPPr>
-          </a:lstStyle>
-          <a:p xmlns:a="http://schemas.openxmlformats.org/drawingml/2006/main">
-            <a:pPr algn="l">
-              <a:lnSpc>
-                <a:spcPct val="115000"/>
-              </a:lnSpc>
-              <a:buNone/>
-              <a:defRPr sz="1200" b="0">
-                <a:solidFill>
-                  <a:srgbClr val="63738A"/>
-                </a:solidFill>
-                <a:latin typeface="맑은 고딕"/>
-                <a:ea typeface="맑은 고딕"/>
-                <a:cs typeface="맑은 고딕"/>
-              </a:defRPr>
-            </a:pPr>
-            <a:r>
-              <a:rPr sz="1200" b="0">
-                <a:solidFill>
-                  <a:srgbClr val="63738A"/>
-                </a:solidFill>
-                <a:latin typeface="맑은 고딕"/>
-                <a:ea typeface="맑은 고딕"/>
-                <a:cs typeface="맑은 고딕"/>
-              </a:rPr>
-              <a:t>승인된 데모 계정과 로컬 테스트 시나리오 사용</a:t>
-            </a:r>
-          </a:p>
-        </p:txBody>
-      </p:sp>
-      <p:sp>
-        <p:nvSpPr>
           <p:cNvPr id="25" name="">
             <a:extLst xmlns:a="http://schemas.openxmlformats.org/drawingml/2006/main">
               <a:ext uri="{FF2B5EF4-FFF2-40B4-BE49-F238E27FC236}">
@@ -16021,7 +15259,7 @@
         </p:nvSpPr>
         <p:spPr>
           <a:xfrm xmlns:a="http://schemas.openxmlformats.org/drawingml/2006/main">
-            <a:off x="609600" y="5219700"/>
+            <a:off x="609600" y="2857500"/>
             <a:ext cx="10972800" cy="457200"/>
           </a:xfrm>
           <a:prstGeom xmlns:a="http://schemas.openxmlformats.org/drawingml/2006/main" prst="rect">
@@ -16073,7 +15311,7 @@
                 <a:ea typeface="맑은 고딕"/>
                 <a:cs typeface="맑은 고딕"/>
               </a:rPr>
-              <a:t>감사합니다</a:t>
+              <a:t>질문을 받겠습니다</a:t>
             </a:r>
           </a:p>
         </p:txBody>
@@ -16094,8 +15332,8 @@
         </p:nvSpPr>
         <p:spPr>
           <a:xfrm xmlns:a="http://schemas.openxmlformats.org/drawingml/2006/main">
-            <a:off x="609600" y="5705475"/>
-            <a:ext cx="10972800" cy="266700"/>
+            <a:off x="609600" y="3714750"/>
+            <a:ext cx="10972800" cy="361950"/>
           </a:xfrm>
           <a:prstGeom xmlns:a="http://schemas.openxmlformats.org/drawingml/2006/main" prst="rect">
             <a:avLst/>
@@ -16146,7 +15384,7 @@
                 <a:ea typeface="맑은 고딕"/>
                 <a:cs typeface="맑은 고딕"/>
               </a:rPr>
-              <a:t>NEXORA  |  Web Security + SentinelOps</a:t>
+              <a:t>감사합니다</a:t>
             </a:r>
           </a:p>
         </p:txBody>
